--- a/media/exports/reports/2026-05/overtime.pptx
+++ b/media/exports/reports/2026-05/overtime.pptx
@@ -232,64 +232,64 @@
                 <c:formatCode>0.0"%";[Red](0.0"%")</c:formatCode>
                 <c:ptCount val="20"/>
                 <c:pt idx="0">
-                  <c:v>1.5</c:v>
+                  <c:v>1.6</c:v>
                 </c:pt>
                 <c:pt idx="1">
-                  <c:v>1.3</c:v>
+                  <c:v>2.7</c:v>
                 </c:pt>
                 <c:pt idx="2">
-                  <c:v>1.9</c:v>
+                  <c:v>2.2</c:v>
                 </c:pt>
                 <c:pt idx="3">
-                  <c:v>2.3</c:v>
+                  <c:v>3.0</c:v>
                 </c:pt>
                 <c:pt idx="4">
-                  <c:v>2.8</c:v>
+                  <c:v>4.6</c:v>
                 </c:pt>
                 <c:pt idx="5">
-                  <c:v>2.4</c:v>
+                  <c:v>4.4</c:v>
                 </c:pt>
                 <c:pt idx="6">
                   <c:v>3.6</c:v>
                 </c:pt>
                 <c:pt idx="7">
-                  <c:v>2.6</c:v>
+                  <c:v>3.7</c:v>
                 </c:pt>
                 <c:pt idx="8">
                   <c:v>2.8</c:v>
                 </c:pt>
                 <c:pt idx="9">
-                  <c:v>2.4</c:v>
+                  <c:v>3.3</c:v>
                 </c:pt>
                 <c:pt idx="10">
-                  <c:v>4.6</c:v>
+                  <c:v>3.3</c:v>
                 </c:pt>
                 <c:pt idx="11">
-                  <c:v>3.0</c:v>
+                  <c:v>3.7</c:v>
                 </c:pt>
                 <c:pt idx="12">
-                  <c:v>4.0</c:v>
+                  <c:v>3.9</c:v>
                 </c:pt>
                 <c:pt idx="13">
-                  <c:v>3.9</c:v>
+                  <c:v>3.8</c:v>
                 </c:pt>
                 <c:pt idx="14">
-                  <c:v>3.5</c:v>
+                  <c:v>7.7</c:v>
                 </c:pt>
                 <c:pt idx="15">
-                  <c:v>3.8</c:v>
+                  <c:v>3.1</c:v>
                 </c:pt>
                 <c:pt idx="16">
-                  <c:v>5.8</c:v>
+                  <c:v>4.2</c:v>
                 </c:pt>
                 <c:pt idx="17">
-                  <c:v>5.6</c:v>
+                  <c:v>4.2</c:v>
                 </c:pt>
                 <c:pt idx="18">
-                  <c:v>5.8</c:v>
+                  <c:v>5.9</c:v>
                 </c:pt>
                 <c:pt idx="19">
-                  <c:v>6.5</c:v>
+                  <c:v>6.7</c:v>
                 </c:pt>
               </c:numCache>
             </c:numRef>
@@ -338,7 +338,7 @@
         <c:axId val="-2100718248"/>
         <c:scaling>
           <c:orientation val="minMax"/>
-          <c:max val="8.0"/>
+          <c:max val="10.0"/>
           <c:min val="0.0"/>
         </c:scaling>
         <c:delete val="0"/>
@@ -491,16 +491,16 @@
                 <c:formatCode>#,##0;[Red](#,##0)</c:formatCode>
                 <c:ptCount val="4"/>
                 <c:pt idx="0">
-                  <c:v>8.0</c:v>
+                  <c:v>2.5</c:v>
                 </c:pt>
                 <c:pt idx="1">
-                  <c:v>11.5</c:v>
+                  <c:v>6.0</c:v>
                 </c:pt>
                 <c:pt idx="2">
-                  <c:v>13.0</c:v>
+                  <c:v>14.5</c:v>
                 </c:pt>
                 <c:pt idx="3">
-                  <c:v>34.5</c:v>
+                  <c:v>45.0</c:v>
                 </c:pt>
               </c:numCache>
             </c:numRef>
@@ -564,7 +564,7 @@
       <c:valAx>
         <c:axId val="-2113994440"/>
         <c:scaling>
-          <c:max val="39.675"/>
+          <c:max val="51.74999999999999"/>
           <c:min val="0.0"/>
         </c:scaling>
         <c:delete/>
@@ -692,22 +692,22 @@
               <c:strCache>
                 <c:ptCount val="7"/>
                 <c:pt idx="0">
-                  <c:v>Technician T7</c:v>
+                  <c:v>Technician T4</c:v>
                 </c:pt>
                 <c:pt idx="1">
+                  <c:v>Technician T6</c:v>
+                </c:pt>
+                <c:pt idx="2">
                   <c:v>Technician T3</c:v>
                 </c:pt>
-                <c:pt idx="2">
-                  <c:v>Technician T6</c:v>
-                </c:pt>
                 <c:pt idx="3">
-                  <c:v>Technician T4</c:v>
+                  <c:v>Technician T1</c:v>
                 </c:pt>
                 <c:pt idx="4">
                   <c:v>Technician T2</c:v>
                 </c:pt>
                 <c:pt idx="5">
-                  <c:v>Technician T1</c:v>
+                  <c:v>Technician T7</c:v>
                 </c:pt>
                 <c:pt idx="6">
                   <c:v>Technician T5</c:v>
@@ -722,25 +722,25 @@
                 <c:formatCode>#,##0;[Red](#,##0)</c:formatCode>
                 <c:ptCount val="7"/>
                 <c:pt idx="0">
-                  <c:v>6.0</c:v>
+                  <c:v>4.5</c:v>
                 </c:pt>
                 <c:pt idx="1">
-                  <c:v>6.5</c:v>
+                  <c:v>4.5</c:v>
                 </c:pt>
                 <c:pt idx="2">
-                  <c:v>8.0</c:v>
+                  <c:v>7.5</c:v>
                 </c:pt>
                 <c:pt idx="3">
-                  <c:v>8.5</c:v>
+                  <c:v>10.5</c:v>
                 </c:pt>
                 <c:pt idx="4">
-                  <c:v>9.5</c:v>
+                  <c:v>11.0</c:v>
                 </c:pt>
                 <c:pt idx="5">
                   <c:v>14.0</c:v>
                 </c:pt>
                 <c:pt idx="6">
-                  <c:v>14.5</c:v>
+                  <c:v>16.0</c:v>
                 </c:pt>
               </c:numCache>
             </c:numRef>
@@ -804,7 +804,7 @@
       <c:valAx>
         <c:axId val="-2113994440"/>
         <c:scaling>
-          <c:max val="16.674999999999997"/>
+          <c:max val="18.4"/>
           <c:min val="0.0"/>
         </c:scaling>
         <c:delete/>
@@ -1301,7 +1301,7 @@
           <a:lstStyle/>
           <a:p>
             <a:r>
-              <a:t>Where is overtime creeping up, and why?. Overtime, May: 6.5%; Overtime hours, May: 67.0 h; May last year: 2.6%. Technicians worked 67.0 h of overtime in May, 6.5% of ordinary hours (target under 5.0%), against 5.8% in April. Over the last year it has gone from 2.6% to 6.5%. After-hours call-out is the main reason: 34.5 h, 51.5% of the overtime. Technician T5 carried the most (14.5 h). Above target by 15.7 h.</a:t>
+              <a:t>Where is overtime creeping up, and why?. Overtime, May: 6.7%; Overtime hours, May: 68.0 h; May last year: 3.7%. Technicians worked 68.0 h of overtime in May, 6.7% of ordinary hours (target under 5.0%), against 5.9% in April. Over the last year it has gone from 3.7% to 6.7%. After-hours call-out is the main reason: 45.0 h, 66.2% of the overtime. Technician T5 carried the most (16.0 h). Above target by 17.1 h.</a:t>
             </a:r>
           </a:p>
         </p:txBody>
@@ -4856,7 +4856,7 @@
                 </a:solidFill>
                 <a:latin typeface="Roboto"/>
               </a:rPr>
-              <a:t>Data retrieved 2pm, Tue 6 Oct 2026 · Generated 8 Oct 2026, 6:29pm · Sample data · Made with Python (python-pptx)</a:t>
+              <a:t>Data retrieved 2pm, Tue 6 Oct 2026 · Generated 8 Oct 2026, 11:41pm · Sample data · Made with Python (python-pptx)</a:t>
             </a:r>
           </a:p>
         </p:txBody>
@@ -5202,7 +5202,7 @@
                 </a:solidFill>
                 <a:latin typeface="Roboto"/>
               </a:rPr>
-              <a:t>6.5%</a:t>
+              <a:t>6.7%</a:t>
             </a:r>
           </a:p>
         </p:txBody>
@@ -5368,7 +5368,7 @@
                 </a:solidFill>
                 <a:latin typeface="Roboto"/>
               </a:rPr>
-              <a:t>67.0 h</a:t>
+              <a:t>68.0 h</a:t>
             </a:r>
           </a:p>
         </p:txBody>
@@ -5407,7 +5407,7 @@
                 </a:solidFill>
                 <a:latin typeface="Roboto"/>
               </a:rPr>
-              <a:t>April 60.0 h</a:t>
+              <a:t>April 60.5 h</a:t>
             </a:r>
           </a:p>
         </p:txBody>
@@ -5534,7 +5534,7 @@
                 </a:solidFill>
                 <a:latin typeface="Roboto"/>
               </a:rPr>
-              <a:t>2.6%</a:t>
+              <a:t>3.7%</a:t>
             </a:r>
           </a:p>
         </p:txBody>
@@ -5573,7 +5573,7 @@
                 </a:solidFill>
                 <a:latin typeface="Roboto"/>
               </a:rPr>
-              <a:t>28.0 h of overtime</a:t>
+              <a:t>33.0 h of overtime</a:t>
             </a:r>
           </a:p>
         </p:txBody>
@@ -5718,7 +5718,7 @@
                 </a:solidFill>
                 <a:latin typeface="Roboto"/>
               </a:rPr>
-              <a:t>Technicians worked 67.0 h of overtime in May, 6.5% of ordinary hours (target under 5.0%), against 5.8% in April. Over the last year it has gone from 2.6% to 6.5%.</a:t>
+              <a:t>Technicians worked 68.0 h of overtime in May, 6.7% of ordinary hours (target under 5.0%), against 5.9% in April. Over the last year it has gone from 3.7% to 6.7%.</a:t>
             </a:r>
           </a:p>
         </p:txBody>
@@ -5845,7 +5845,7 @@
                 </a:solidFill>
                 <a:latin typeface="Roboto"/>
               </a:rPr>
-              <a:t>After-hours call-out is the main reason: 34.5 h, 51.5% of the overtime. Technician T5 carried the most (14.5 h). Above target by 15.7 h.</a:t>
+              <a:t>After-hours call-out is the main reason: 45.0 h, 66.2% of the overtime. Technician T5 carried the most (16.0 h). Above target by 17.1 h.</a:t>
             </a:r>
           </a:p>
         </p:txBody>
@@ -5923,7 +5923,7 @@
                 </a:solidFill>
                 <a:latin typeface="Roboto"/>
               </a:rPr>
-              <a:t>Data retrieved 2pm, Tue 6 Oct 2026 · Generated 8 Oct 2026, 6:29pm · Sample data · Made with Python (python-pptx)</a:t>
+              <a:t>Data retrieved 2pm, Tue 6 Oct 2026 · Generated 8 Oct 2026, 11:41pm · Sample data · Made with Python (python-pptx)</a:t>
             </a:r>
           </a:p>
         </p:txBody>
@@ -6238,7 +6238,7 @@
                 </a:solidFill>
                 <a:latin typeface="Roboto"/>
               </a:rPr>
-              <a:t>Data retrieved 2pm, Tue 6 Oct 2026 · Generated 8 Oct 2026, 6:29pm · Sample data · Made with Python (python-pptx)</a:t>
+              <a:t>Data retrieved 2pm, Tue 6 Oct 2026 · Generated 8 Oct 2026, 11:41pm · Sample data · Made with Python (python-pptx)</a:t>
             </a:r>
           </a:p>
         </p:txBody>
@@ -6553,7 +6553,7 @@
                 </a:solidFill>
                 <a:latin typeface="Roboto"/>
               </a:rPr>
-              <a:t>Data retrieved 2pm, Tue 6 Oct 2026 · Generated 8 Oct 2026, 6:29pm · Sample data · Made with Python (python-pptx)</a:t>
+              <a:t>Data retrieved 2pm, Tue 6 Oct 2026 · Generated 8 Oct 2026, 11:41pm · Sample data · Made with Python (python-pptx)</a:t>
             </a:r>
           </a:p>
         </p:txBody>

--- a/media/exports/reports/2026-05/overtime.pptx
+++ b/media/exports/reports/2026-05/overtime.pptx
@@ -1231,7 +1231,7 @@
           <a:lstStyle/>
           <a:p>
             <a:r>
-              <a:t>Where is overtime creeping up, and why?. Sample Electrical &amp; Air Pty Ltd. Period: May 2026. Each technician's paid hours, day by day: ordinary hours and overtime, with the main reason for the overtime.</a:t>
+              <a:t>Where is overtime creeping up, and why?. Sample Electrical &amp; Air Pty Ltd. Period: May 2026. In short: Overtime was 6.7% of ordinary hours in May (target under 5.0%), up from 3.7% a year earlier. Each technician's paid hours, day by day: ordinary hours and overtime, with the main reason for the overtime.</a:t>
             </a:r>
           </a:p>
         </p:txBody>
@@ -4691,7 +4691,7 @@
                 </a:solidFill>
                 <a:latin typeface="Roboto"/>
               </a:rPr>
-              <a:t>Period: May 2026. Each technician's paid hours, day by day: ordinary hours and overtime, with the main reason for the overtime.</a:t>
+              <a:t>Period: May 2026. In short: Overtime was 6.7% of ordinary hours in May (target under 5.0%), up from 3.7% a year earlier. Each technician's paid hours, day by day: ordinary hours and overtime, with the main reason for the overtime.</a:t>
             </a:r>
           </a:p>
         </p:txBody>
@@ -4856,7 +4856,7 @@
                 </a:solidFill>
                 <a:latin typeface="Roboto"/>
               </a:rPr>
-              <a:t>Data retrieved 2pm, Tue 6 Oct 2026 · Generated 8 Oct 2026, 11:41pm · Sample data · Made with Python (python-pptx)</a:t>
+              <a:t>Data retrieved 2pm, Tue 6 Oct 2026 · Generated 10 Oct 2026, 9:55pm · Sample data · Made with Python (python-pptx)</a:t>
             </a:r>
           </a:p>
         </p:txBody>
@@ -5923,7 +5923,7 @@
                 </a:solidFill>
                 <a:latin typeface="Roboto"/>
               </a:rPr>
-              <a:t>Data retrieved 2pm, Tue 6 Oct 2026 · Generated 8 Oct 2026, 11:41pm · Sample data · Made with Python (python-pptx)</a:t>
+              <a:t>Data retrieved 2pm, Tue 6 Oct 2026 · Generated 10 Oct 2026, 9:55pm · Sample data · Made with Python (python-pptx)</a:t>
             </a:r>
           </a:p>
         </p:txBody>
@@ -6238,7 +6238,7 @@
                 </a:solidFill>
                 <a:latin typeface="Roboto"/>
               </a:rPr>
-              <a:t>Data retrieved 2pm, Tue 6 Oct 2026 · Generated 8 Oct 2026, 11:41pm · Sample data · Made with Python (python-pptx)</a:t>
+              <a:t>Data retrieved 2pm, Tue 6 Oct 2026 · Generated 10 Oct 2026, 9:55pm · Sample data · Made with Python (python-pptx)</a:t>
             </a:r>
           </a:p>
         </p:txBody>
@@ -6553,7 +6553,7 @@
                 </a:solidFill>
                 <a:latin typeface="Roboto"/>
               </a:rPr>
-              <a:t>Data retrieved 2pm, Tue 6 Oct 2026 · Generated 8 Oct 2026, 11:41pm · Sample data · Made with Python (python-pptx)</a:t>
+              <a:t>Data retrieved 2pm, Tue 6 Oct 2026 · Generated 10 Oct 2026, 9:55pm · Sample data · Made with Python (python-pptx)</a:t>
             </a:r>
           </a:p>
         </p:txBody>
